--- a/public/fun/pack/pptx/newspro/카드뉴스프리미엄_09_감사·칭찬_로제브론즈.pptx
+++ b/public/fun/pack/pptx/newspro/카드뉴스프리미엄_09_감사·칭찬_로제브론즈.pptx
@@ -113,12 +113,12 @@
   <p:extLst>
     <p:ext uri="{521415D9-36F7-43E2-AB2F-B90AF26B5E84}">
       <p14:sectionLst xmlns:p14="http://schemas.microsoft.com/office/powerpoint/2010/main">
-        <p14:section name="시작" id="{3DCE1052-434F-47FE-9E66-8707569C3069}">
+        <p14:section name="시작" id="{3F52EB2C-1161-43FA-B537-956E0AFE9145}">
           <p14:sldIdLst>
             <p14:sldId id="256"/>
           </p14:sldIdLst>
         </p14:section>
-        <p14:section name="본문" id="{E7D4E508-BB71-437B-91BC-8F024E06A179}">
+        <p14:section name="본문" id="{D30156A4-8EAE-4113-BA67-733D0FE3A2C3}">
           <p14:sldIdLst>
             <p14:sldId id="257"/>
             <p14:sldId id="258"/>
@@ -127,7 +127,7 @@
             <p14:sldId id="261"/>
           </p14:sldIdLst>
         </p14:section>
-        <p14:section name="마무리" id="{09A6ACF4-3B20-4E8F-B1F0-0CD5630D72D8}">
+        <p14:section name="마무리" id="{425AD5C6-ADFB-4067-BADF-A1CAAA4C1A98}">
           <p14:sldIdLst>
             <p14:sldId id="262"/>
           </p14:sldIdLst>
@@ -1518,7 +1518,7 @@
             </a:lvl1pPr>
           </a:lstStyle>
           <a:p>
-            <a:fld id="{CA8FA994-5176-427F-A3E8-1C93EE1E3B0B}" type="slidenum">
+            <a:fld id="{C4D0DCAA-D0C3-4BE5-860C-A71D6842A421}" type="slidenum">
               <a:rPr lang="en-US"/>
               <a:t>‹#›</a:t>
             </a:fld>
@@ -2202,7 +2202,7 @@
             </a:lvl1pPr>
           </a:lstStyle>
           <a:p>
-            <a:fld id="{B7AC5C30-4981-440B-B6B1-75F87DE4553F}" type="slidenum">
+            <a:fld id="{86EFBC5F-12A2-4268-882F-E9C554E81403}" type="slidenum">
               <a:rPr lang="en-US"/>
               <a:t>‹#›</a:t>
             </a:fld>
@@ -2886,7 +2886,7 @@
             </a:lvl1pPr>
           </a:lstStyle>
           <a:p>
-            <a:fld id="{0DE4DF39-04FC-440D-ACF6-BF2E2091FCC7}" type="slidenum">
+            <a:fld id="{B4FB6041-A55E-43A7-B754-DA63AEC62E1A}" type="slidenum">
               <a:rPr lang="en-US"/>
               <a:t>‹#›</a:t>
             </a:fld>
@@ -3816,7 +3816,7 @@
           <a:bodyPr/>
           <a:lstStyle/>
           <a:p>
-            <a:fld id="{33316DAD-7C88-4577-9F5A-8A5454C2A56F}" type="slidenum">
+            <a:fld id="{72448A94-9677-448C-8EAC-724381D1B555}" type="slidenum">
               <a:rPr lang="en-US"/>
               <a:t>‹#›</a:t>
             </a:fld>
@@ -3982,7 +3982,7 @@
           <a:bodyPr/>
           <a:lstStyle/>
           <a:p>
-            <a:fld id="{595D14C9-D33B-48FE-97C2-7E1CC497F076}" type="slidenum">
+            <a:fld id="{BA8729DB-AC5D-4D45-84E9-CB71943D4F2B}" type="slidenum">
               <a:rPr lang="en-US"/>
               <a:t>‹#›</a:t>
             </a:fld>
@@ -4148,7 +4148,7 @@
           <a:bodyPr/>
           <a:lstStyle/>
           <a:p>
-            <a:fld id="{0E571758-9A97-4129-81EA-5C6342503C5A}" type="slidenum">
+            <a:fld id="{EBAAA5D6-04E7-488C-AEC6-AD23AA376A25}" type="slidenum">
               <a:rPr lang="en-US"/>
               <a:t>‹#›</a:t>
             </a:fld>
@@ -4314,7 +4314,7 @@
           <a:bodyPr/>
           <a:lstStyle/>
           <a:p>
-            <a:fld id="{26C74462-DA95-4058-B76C-E658F74D7663}" type="slidenum">
+            <a:fld id="{A06A1A8E-CBF8-4401-9B5F-0883942CCE36}" type="slidenum">
               <a:rPr lang="en-US"/>
               <a:t>‹#›</a:t>
             </a:fld>
@@ -4480,7 +4480,7 @@
           <a:bodyPr/>
           <a:lstStyle/>
           <a:p>
-            <a:fld id="{85102354-6E56-4B19-B2CF-0C82CFD40E10}" type="slidenum">
+            <a:fld id="{8CAA3011-CE18-4DF8-949C-8D04D0AEB743}" type="slidenum">
               <a:rPr lang="en-US"/>
               <a:t>‹#›</a:t>
             </a:fld>
